--- a/examples/repositories/native-math-showcase/source/deck-placeholders.pptx
+++ b/examples/repositories/native-math-showcase/source/deck-placeholders.pptx
@@ -139,13 +139,13 @@
           </c:tx>
           <c:spPr>
             <a:solidFill>
-              <a:srgbClr val="0173B2"/>
+              <a:srgbClr val="006B98"/>
             </a:solidFill>
             <a:effectLst/>
           </c:spPr>
           <c:invertIfNegative val="0"/>
           <c:dLbls>
-            <c:numFmt formatCode="#,##0" sourceLinked="0"/>
+            <c:numFmt formatCode="0" sourceLinked="0"/>
             <c:txPr>
               <a:bodyPr/>
               <a:lstStyle/>
@@ -153,7 +153,7 @@
                 <a:pPr>
                   <a:defRPr b="0" i="0" strike="noStrike" sz="1200" u="none">
                     <a:solidFill>
-                      <a:srgbClr val="000000"/>
+                      <a:srgbClr val="2D3436"/>
                     </a:solidFill>
                     <a:latin typeface="Arial"/>
                   </a:defRPr>
@@ -161,7 +161,7 @@
               </a:p>
             </c:txPr>
             <c:showLegendKey val="0"/>
-            <c:showVal val="0"/>
+            <c:showVal val="1"/>
             <c:showCatName val="0"/>
             <c:showSerName val="0"/>
             <c:showPercent val="0"/>
@@ -222,13 +222,13 @@
           </c:tx>
           <c:spPr>
             <a:solidFill>
-              <a:srgbClr val="DE8F05"/>
+              <a:srgbClr val="A65A00"/>
             </a:solidFill>
             <a:effectLst/>
           </c:spPr>
           <c:invertIfNegative val="0"/>
           <c:dLbls>
-            <c:numFmt formatCode="#,##0" sourceLinked="0"/>
+            <c:numFmt formatCode="0" sourceLinked="0"/>
             <c:txPr>
               <a:bodyPr/>
               <a:lstStyle/>
@@ -236,7 +236,7 @@
                 <a:pPr>
                   <a:defRPr b="0" i="0" strike="noStrike" sz="1200" u="none">
                     <a:solidFill>
-                      <a:srgbClr val="000000"/>
+                      <a:srgbClr val="2D3436"/>
                     </a:solidFill>
                     <a:latin typeface="Arial"/>
                   </a:defRPr>
@@ -244,7 +244,7 @@
               </a:p>
             </c:txPr>
             <c:showLegendKey val="0"/>
-            <c:showVal val="0"/>
+            <c:showVal val="1"/>
             <c:showCatName val="0"/>
             <c:showSerName val="0"/>
             <c:showPercent val="0"/>
@@ -290,7 +290,7 @@
           </c:val>
         </c:ser>
         <c:dLbls>
-          <c:numFmt formatCode="#,##0" sourceLinked="0"/>
+          <c:numFmt formatCode="0" sourceLinked="0"/>
           <c:txPr>
             <a:bodyPr/>
             <a:lstStyle/>
@@ -298,7 +298,7 @@
               <a:pPr>
                 <a:defRPr b="0" i="0" strike="noStrike" sz="1200" u="none">
                   <a:solidFill>
-                    <a:srgbClr val="000000"/>
+                    <a:srgbClr val="2D3436"/>
                   </a:solidFill>
                   <a:latin typeface="Arial"/>
                 </a:defRPr>
@@ -306,7 +306,7 @@
             </a:p>
           </c:txPr>
           <c:showLegendKey val="0"/>
-          <c:showVal val="0"/>
+          <c:showVal val="1"/>
           <c:showCatName val="0"/>
           <c:showSerName val="0"/>
           <c:showPercent val="0"/>
@@ -364,7 +364,7 @@
         <c:axId val="2094734552"/>
         <c:scaling>
           <c:orientation val="minMax"/>
-          <c:max val="25"/>
+          <c:max val="30"/>
           <c:min val="0"/>
         </c:scaling>
         <c:delete val="0"/>
@@ -411,7 +411,7 @@
         <c:crossAx val="2094734554"/>
         <c:crosses val="autoZero"/>
         <c:crossBetween val="between"/>
-        <c:majorUnit val="5"/>
+        <c:majorUnit val="10"/>
       </c:valAx>
       <c:spPr>
         <a:noFill/>
@@ -487,7 +487,7 @@
           </c:tx>
           <c:spPr>
             <a:solidFill>
-              <a:srgbClr val="0173B2"/>
+              <a:srgbClr val="006B98"/>
             </a:solidFill>
             <a:effectLst/>
           </c:spPr>
@@ -522,7 +522,7 @@
             <c:bubble3D val="0"/>
             <c:spPr>
               <a:solidFill>
-                <a:srgbClr val="0173B2"/>
+                <a:srgbClr val="006B98"/>
               </a:solidFill>
               <a:effectLst/>
             </c:spPr>
@@ -533,7 +533,7 @@
             <c:bubble3D val="0"/>
             <c:spPr>
               <a:solidFill>
-                <a:srgbClr val="DE8F05"/>
+                <a:srgbClr val="A65A00"/>
               </a:solidFill>
               <a:effectLst/>
             </c:spPr>
@@ -2058,7 +2058,7 @@
         <p:spPr>
           <a:xfrm>
             <a:off x="502920" y="1024128"/>
-            <a:ext cx="4663440" cy="1554480"/>
+            <a:ext cx="4206240" cy="1554480"/>
           </a:xfrm>
           <a:prstGeom prst="rect">
             <a:avLst/>
@@ -3670,7 +3670,7 @@
         </p:nvSpPr>
         <p:spPr>
           <a:xfrm>
-            <a:off x="4937760" y="1536192"/>
+            <a:off x="4937760" y="1627632"/>
             <a:ext cx="3657600" cy="960120"/>
           </a:xfrm>
           <a:prstGeom prst="rect">
@@ -3711,7 +3711,7 @@
         </p:nvSpPr>
         <p:spPr>
           <a:xfrm>
-            <a:off x="594360" y="3447288"/>
+            <a:off x="594360" y="3374136"/>
             <a:ext cx="4023360" cy="914400"/>
           </a:xfrm>
           <a:prstGeom prst="rect">
@@ -3732,7 +3732,7 @@
             <a:r>
               <a:rPr lang="en-US" sz="2500" dirty="0">
                 <a:solidFill>
-                  <a:srgbClr val="0173B2"/>
+                  <a:srgbClr val="006B98"/>
                 </a:solidFill>
                 <a:latin typeface="BIZ UDPGothic" pitchFamily="34" charset="0"/>
                 <a:ea typeface="BIZ UDPGothic" pitchFamily="34" charset="-122"/>
@@ -3752,8 +3752,8 @@
         </p:nvSpPr>
         <p:spPr>
           <a:xfrm>
-            <a:off x="4800600" y="3447288"/>
-            <a:ext cx="3749040" cy="914400"/>
+            <a:off x="4937760" y="3300984"/>
+            <a:ext cx="3657600" cy="914400"/>
           </a:xfrm>
           <a:prstGeom prst="rect">
             <a:avLst/>
@@ -3767,21 +3767,38 @@
           </a:bodyPr>
           <a:lstStyle/>
           <a:p>
-            <a:pPr algn="ctr" indent="0" marL="0">
+            <a:pPr indent="0" marL="0">
               <a:buNone/>
             </a:pPr>
             <a:r>
-              <a:rPr lang="en-US" sz="2500" dirty="0">
+              <a:rPr lang="en-US" sz="2000" dirty="0">
                 <a:solidFill>
-                  <a:srgbClr val="DE8F05"/>
+                  <a:srgbClr val="A65A00"/>
                 </a:solidFill>
                 <a:latin typeface="BIZ UDPGothic" pitchFamily="34" charset="0"/>
                 <a:ea typeface="BIZ UDPGothic" pitchFamily="34" charset="-122"/>
                 <a:cs typeface="BIZ UDPGothic" pitchFamily="34" charset="-120"/>
               </a:rPr>
-              <a:t>{{MATH:mean-b}}</a:t>
+              <a:t>Bも合計15点。</a:t>
             </a:r>
-            <a:endParaRPr lang="en-US" sz="2500" dirty="0"/>
+            <a:endParaRPr lang="en-US" sz="2000" dirty="0"/>
+          </a:p>
+          <a:p>
+            <a:pPr indent="0" marL="0">
+              <a:buNone/>
+            </a:pPr>
+            <a:r>
+              <a:rPr lang="en-US" sz="2000" dirty="0">
+                <a:solidFill>
+                  <a:srgbClr val="A65A00"/>
+                </a:solidFill>
+                <a:latin typeface="BIZ UDPGothic" pitchFamily="34" charset="0"/>
+                <a:ea typeface="BIZ UDPGothic" pitchFamily="34" charset="-122"/>
+                <a:cs typeface="BIZ UDPGothic" pitchFamily="34" charset="-120"/>
+              </a:rPr>
+              <a:t>3件で割ると平均は5点。</a:t>
+            </a:r>
+            <a:endParaRPr lang="en-US" sz="2000" dirty="0"/>
           </a:p>
         </p:txBody>
       </p:sp>
@@ -3793,7 +3810,7 @@
         </p:nvSpPr>
         <p:spPr>
           <a:xfrm>
-            <a:off x="594360" y="4416552"/>
+            <a:off x="594360" y="4343400"/>
             <a:ext cx="7955280" cy="228600"/>
           </a:xfrm>
           <a:prstGeom prst="rect">
@@ -4024,7 +4041,7 @@
         <p:spPr>
           <a:xfrm>
             <a:off x="548640" y="1417320"/>
-            <a:ext cx="8046720" cy="1005840"/>
+            <a:ext cx="8046720" cy="594360"/>
           </a:xfrm>
           <a:prstGeom prst="rect">
             <a:avLst/>
@@ -4038,11 +4055,11 @@
           </a:bodyPr>
           <a:lstStyle/>
           <a:p>
-            <a:pPr algn="ctr" indent="0" marL="0">
+            <a:pPr indent="0" marL="0">
               <a:buNone/>
             </a:pPr>
             <a:r>
-              <a:rPr lang="en-US" sz="2900" dirty="0">
+              <a:rPr lang="en-US" sz="2500" b="1" dirty="0">
                 <a:solidFill>
                   <a:srgbClr val="2D3436"/>
                 </a:solidFill>
@@ -4050,9 +4067,9 @@
                 <a:ea typeface="BIZ UDPGothic" pitchFamily="34" charset="-122"/>
                 <a:cs typeface="BIZ UDPGothic" pitchFamily="34" charset="-120"/>
               </a:rPr>
-              <a:t>{{MATH:variance}}</a:t>
+              <a:t>平均との差を二乗 → 足す → 件数で割る</a:t>
             </a:r>
-            <a:endParaRPr lang="en-US" sz="2900" dirty="0"/>
+            <a:endParaRPr lang="en-US" sz="2500" dirty="0"/>
           </a:p>
         </p:txBody>
       </p:sp>
@@ -4080,8 +4097,8 @@
         </p:nvSpPr>
         <p:spPr>
           <a:xfrm>
-            <a:off x="731520" y="4151376"/>
-            <a:ext cx="3749040" cy="228600"/>
+            <a:off x="731520" y="2340864"/>
+            <a:ext cx="4114800" cy="182880"/>
           </a:xfrm>
           <a:prstGeom prst="rect">
             <a:avLst/>
@@ -4107,7 +4124,7 @@
                 <a:ea typeface="BIZ UDPGothic" pitchFamily="34" charset="-122"/>
                 <a:cs typeface="BIZ UDPGothic" pitchFamily="34" charset="-120"/>
               </a:rPr>
-              <a:t>二乗したずれの大きさ</a:t>
+              <a:t>二乗したずれ：A=1,0,1 ／ B=25,0,25</a:t>
             </a:r>
             <a:endParaRPr lang="en-US" sz="1100" dirty="0"/>
           </a:p>
@@ -4142,7 +4159,7 @@
             <a:r>
               <a:rPr lang="en-US" sz="2400" dirty="0">
                 <a:solidFill>
-                  <a:srgbClr val="0173B2"/>
+                  <a:srgbClr val="006B98"/>
                 </a:solidFill>
                 <a:latin typeface="BIZ UDPGothic" pitchFamily="34" charset="0"/>
                 <a:ea typeface="BIZ UDPGothic" pitchFamily="34" charset="-122"/>
@@ -4183,7 +4200,7 @@
             <a:r>
               <a:rPr lang="en-US" sz="2400" dirty="0">
                 <a:solidFill>
-                  <a:srgbClr val="DE8F05"/>
+                  <a:srgbClr val="A65A00"/>
                 </a:solidFill>
                 <a:latin typeface="BIZ UDPGothic" pitchFamily="34" charset="0"/>
                 <a:ea typeface="BIZ UDPGothic" pitchFamily="34" charset="-122"/>
@@ -4433,8 +4450,8 @@
         </p:nvSpPr>
         <p:spPr>
           <a:xfrm>
-            <a:off x="548640" y="1481328"/>
-            <a:ext cx="2834640" cy="914400"/>
+            <a:off x="594360" y="1554480"/>
+            <a:ext cx="3657600" cy="594360"/>
           </a:xfrm>
           <a:prstGeom prst="rect">
             <a:avLst/>
@@ -4448,11 +4465,11 @@
           </a:bodyPr>
           <a:lstStyle/>
           <a:p>
-            <a:pPr algn="ctr" indent="0" marL="0">
+            <a:pPr indent="0" marL="0">
               <a:buNone/>
             </a:pPr>
             <a:r>
-              <a:rPr lang="en-US" sz="3700" dirty="0">
+              <a:rPr lang="en-US" sz="2700" b="1" dirty="0">
                 <a:solidFill>
                   <a:srgbClr val="2D3436"/>
                 </a:solidFill>
@@ -4460,9 +4477,9 @@
                 <a:ea typeface="BIZ UDPGothic" pitchFamily="34" charset="-122"/>
                 <a:cs typeface="BIZ UDPGothic" pitchFamily="34" charset="-120"/>
               </a:rPr>
-              <a:t>{{MATH:sd}}</a:t>
+              <a:t>分散の平方根をとる</a:t>
             </a:r>
-            <a:endParaRPr lang="en-US" sz="3700" dirty="0"/>
+            <a:endParaRPr lang="en-US" sz="2700" dirty="0"/>
           </a:p>
         </p:txBody>
       </p:sp>
@@ -4474,8 +4491,8 @@
         </p:nvSpPr>
         <p:spPr>
           <a:xfrm>
-            <a:off x="4297680" y="1554480"/>
-            <a:ext cx="4206240" cy="749808"/>
+            <a:off x="4754880" y="1554480"/>
+            <a:ext cx="3794760" cy="749808"/>
           </a:xfrm>
           <a:prstGeom prst="rect">
             <a:avLst/>
@@ -4553,7 +4570,7 @@
             <a:r>
               <a:rPr lang="en-US" sz="2600" dirty="0">
                 <a:solidFill>
-                  <a:srgbClr val="0173B2"/>
+                  <a:srgbClr val="006B98"/>
                 </a:solidFill>
                 <a:latin typeface="BIZ UDPGothic" pitchFamily="34" charset="0"/>
                 <a:ea typeface="BIZ UDPGothic" pitchFamily="34" charset="-122"/>
@@ -4594,7 +4611,7 @@
             <a:r>
               <a:rPr lang="en-US" sz="2600" dirty="0">
                 <a:solidFill>
-                  <a:srgbClr val="DE8F05"/>
+                  <a:srgbClr val="A65A00"/>
                 </a:solidFill>
                 <a:latin typeface="BIZ UDPGothic" pitchFamily="34" charset="0"/>
                 <a:ea typeface="BIZ UDPGothic" pitchFamily="34" charset="-122"/>
@@ -4966,7 +4983,7 @@
           </p:nvPr>
         </p:nvGraphicFramePr>
         <p:xfrm>
-          <a:off x="594360" y="3511296"/>
+          <a:off x="594360" y="3401568"/>
           <a:ext cx="7863840" cy="914400"/>
         </p:xfrm>
         <a:graphic>
@@ -4987,14 +5004,14 @@
                       <a:pPr algn="ctr" indent="0" marL="0">
                         <a:buNone/>
                       </a:pPr>
-                      <a:endParaRPr lang="en-US" sz="1600" dirty="0">
+                      <a:endParaRPr lang="en-US" sz="1500" dirty="0">
                         <a:latin typeface="BIZ UDPGothic" charset="0"/>
                         <a:ea typeface="BIZ UDPGothic" charset="0"/>
                         <a:cs typeface="BIZ UDPGothic" charset="0"/>
                       </a:endParaRPr>
                     </a:p>
                   </a:txBody>
-                  <a:tcPr marL="63500" marR="63500" marT="63500" marB="63500">
+                  <a:tcPr marL="38100" marR="38100" marT="38100" marB="38100">
                     <a:lnL w="5080" cap="flat" cmpd="sng" algn="ctr">
                       <a:solidFill>
                         <a:srgbClr val="677276"/>
@@ -5045,7 +5062,7 @@
                         <a:buNone/>
                       </a:pPr>
                       <a:r>
-                        <a:rPr lang="en-US" sz="1600" dirty="0">
+                        <a:rPr lang="en-US" sz="1500" dirty="0">
                           <a:solidFill>
                             <a:srgbClr val="60B5E2"/>
                           </a:solidFill>
@@ -5055,14 +5072,14 @@
                         </a:rPr>
                         <a:t>A</a:t>
                       </a:r>
-                      <a:endParaRPr lang="en-US" sz="1600" dirty="0">
+                      <a:endParaRPr lang="en-US" sz="1500" dirty="0">
                         <a:latin typeface="BIZ UDPGothic" charset="0"/>
                         <a:ea typeface="BIZ UDPGothic" charset="0"/>
                         <a:cs typeface="BIZ UDPGothic" charset="0"/>
                       </a:endParaRPr>
                     </a:p>
                   </a:txBody>
-                  <a:tcPr marL="63500" marR="63500" marT="63500" marB="63500">
+                  <a:tcPr marL="38100" marR="38100" marT="38100" marB="38100">
                     <a:lnL w="5080" cap="flat" cmpd="sng" algn="ctr">
                       <a:solidFill>
                         <a:srgbClr val="677276"/>
@@ -5113,7 +5130,7 @@
                         <a:buNone/>
                       </a:pPr>
                       <a:r>
-                        <a:rPr lang="en-US" sz="1600" dirty="0">
+                        <a:rPr lang="en-US" sz="1500" dirty="0">
                           <a:solidFill>
                             <a:srgbClr val="F5B451"/>
                           </a:solidFill>
@@ -5123,14 +5140,14 @@
                         </a:rPr>
                         <a:t>B</a:t>
                       </a:r>
-                      <a:endParaRPr lang="en-US" sz="1600" dirty="0">
+                      <a:endParaRPr lang="en-US" sz="1500" dirty="0">
                         <a:latin typeface="BIZ UDPGothic" charset="0"/>
                         <a:ea typeface="BIZ UDPGothic" charset="0"/>
                         <a:cs typeface="BIZ UDPGothic" charset="0"/>
                       </a:endParaRPr>
                     </a:p>
                   </a:txBody>
-                  <a:tcPr marL="63500" marR="63500" marT="63500" marB="63500">
+                  <a:tcPr marL="38100" marR="38100" marT="38100" marB="38100">
                     <a:lnL w="5080" cap="flat" cmpd="sng" algn="ctr">
                       <a:solidFill>
                         <a:srgbClr val="677276"/>
@@ -5183,7 +5200,7 @@
                         <a:buNone/>
                       </a:pPr>
                       <a:r>
-                        <a:rPr lang="en-US" sz="1600" dirty="0">
+                        <a:rPr lang="en-US" sz="1500" dirty="0">
                           <a:solidFill>
                             <a:srgbClr val="FFFFFF"/>
                           </a:solidFill>
@@ -5193,14 +5210,14 @@
                         </a:rPr>
                         <a:t>平均（点）</a:t>
                       </a:r>
-                      <a:endParaRPr lang="en-US" sz="1600" dirty="0">
+                      <a:endParaRPr lang="en-US" sz="1500" dirty="0">
                         <a:latin typeface="BIZ UDPGothic" charset="0"/>
                         <a:ea typeface="BIZ UDPGothic" charset="0"/>
                         <a:cs typeface="BIZ UDPGothic" charset="0"/>
                       </a:endParaRPr>
                     </a:p>
                   </a:txBody>
-                  <a:tcPr marL="63500" marR="63500" marT="63500" marB="63500">
+                  <a:tcPr marL="38100" marR="38100" marT="38100" marB="38100">
                     <a:lnL w="5080" cap="flat" cmpd="sng" algn="ctr">
                       <a:solidFill>
                         <a:srgbClr val="677276"/>
@@ -5251,7 +5268,7 @@
                         <a:buNone/>
                       </a:pPr>
                       <a:r>
-                        <a:rPr lang="en-US" sz="1600" dirty="0">
+                        <a:rPr lang="en-US" sz="1500" dirty="0">
                           <a:solidFill>
                             <a:srgbClr val="FFFFFF"/>
                           </a:solidFill>
@@ -5261,14 +5278,14 @@
                         </a:rPr>
                         <a:t>5</a:t>
                       </a:r>
-                      <a:endParaRPr lang="en-US" sz="1600" dirty="0">
+                      <a:endParaRPr lang="en-US" sz="1500" dirty="0">
                         <a:latin typeface="BIZ UDPGothic" charset="0"/>
                         <a:ea typeface="BIZ UDPGothic" charset="0"/>
                         <a:cs typeface="BIZ UDPGothic" charset="0"/>
                       </a:endParaRPr>
                     </a:p>
                   </a:txBody>
-                  <a:tcPr marL="63500" marR="63500" marT="63500" marB="63500">
+                  <a:tcPr marL="38100" marR="38100" marT="38100" marB="38100">
                     <a:lnL w="5080" cap="flat" cmpd="sng" algn="ctr">
                       <a:solidFill>
                         <a:srgbClr val="677276"/>
@@ -5319,7 +5336,7 @@
                         <a:buNone/>
                       </a:pPr>
                       <a:r>
-                        <a:rPr lang="en-US" sz="1600" dirty="0">
+                        <a:rPr lang="en-US" sz="1500" dirty="0">
                           <a:solidFill>
                             <a:srgbClr val="FFFFFF"/>
                           </a:solidFill>
@@ -5329,14 +5346,14 @@
                         </a:rPr>
                         <a:t>5</a:t>
                       </a:r>
-                      <a:endParaRPr lang="en-US" sz="1600" dirty="0">
+                      <a:endParaRPr lang="en-US" sz="1500" dirty="0">
                         <a:latin typeface="BIZ UDPGothic" charset="0"/>
                         <a:ea typeface="BIZ UDPGothic" charset="0"/>
                         <a:cs typeface="BIZ UDPGothic" charset="0"/>
                       </a:endParaRPr>
                     </a:p>
                   </a:txBody>
-                  <a:tcPr marL="63500" marR="63500" marT="63500" marB="63500">
+                  <a:tcPr marL="38100" marR="38100" marT="38100" marB="38100">
                     <a:lnL w="5080" cap="flat" cmpd="sng" algn="ctr">
                       <a:solidFill>
                         <a:srgbClr val="677276"/>
@@ -5389,7 +5406,7 @@
                         <a:buNone/>
                       </a:pPr>
                       <a:r>
-                        <a:rPr lang="en-US" sz="1600" dirty="0">
+                        <a:rPr lang="en-US" sz="1500" dirty="0">
                           <a:solidFill>
                             <a:srgbClr val="FFFFFF"/>
                           </a:solidFill>
@@ -5399,14 +5416,14 @@
                         </a:rPr>
                         <a:t>標準偏差（点）</a:t>
                       </a:r>
-                      <a:endParaRPr lang="en-US" sz="1600" dirty="0">
+                      <a:endParaRPr lang="en-US" sz="1500" dirty="0">
                         <a:latin typeface="BIZ UDPGothic" charset="0"/>
                         <a:ea typeface="BIZ UDPGothic" charset="0"/>
                         <a:cs typeface="BIZ UDPGothic" charset="0"/>
                       </a:endParaRPr>
                     </a:p>
                   </a:txBody>
-                  <a:tcPr marL="63500" marR="63500" marT="63500" marB="63500">
+                  <a:tcPr marL="38100" marR="38100" marT="38100" marB="38100">
                     <a:lnL w="5080" cap="flat" cmpd="sng" algn="ctr">
                       <a:solidFill>
                         <a:srgbClr val="677276"/>
@@ -5457,7 +5474,7 @@
                         <a:buNone/>
                       </a:pPr>
                       <a:r>
-                        <a:rPr lang="en-US" sz="1600" dirty="0">
+                        <a:rPr lang="en-US" sz="1500" dirty="0">
                           <a:solidFill>
                             <a:srgbClr val="FFFFFF"/>
                           </a:solidFill>
@@ -5467,14 +5484,14 @@
                         </a:rPr>
                         <a:t>0.82</a:t>
                       </a:r>
-                      <a:endParaRPr lang="en-US" sz="1600" dirty="0">
+                      <a:endParaRPr lang="en-US" sz="1500" dirty="0">
                         <a:latin typeface="BIZ UDPGothic" charset="0"/>
                         <a:ea typeface="BIZ UDPGothic" charset="0"/>
                         <a:cs typeface="BIZ UDPGothic" charset="0"/>
                       </a:endParaRPr>
                     </a:p>
                   </a:txBody>
-                  <a:tcPr marL="63500" marR="63500" marT="63500" marB="63500">
+                  <a:tcPr marL="38100" marR="38100" marT="38100" marB="38100">
                     <a:lnL w="5080" cap="flat" cmpd="sng" algn="ctr">
                       <a:solidFill>
                         <a:srgbClr val="677276"/>
@@ -5525,7 +5542,7 @@
                         <a:buNone/>
                       </a:pPr>
                       <a:r>
-                        <a:rPr lang="en-US" sz="1600" dirty="0">
+                        <a:rPr lang="en-US" sz="1500" dirty="0">
                           <a:solidFill>
                             <a:srgbClr val="FFFFFF"/>
                           </a:solidFill>
@@ -5535,14 +5552,14 @@
                         </a:rPr>
                         <a:t>4.08</a:t>
                       </a:r>
-                      <a:endParaRPr lang="en-US" sz="1600" dirty="0">
+                      <a:endParaRPr lang="en-US" sz="1500" dirty="0">
                         <a:latin typeface="BIZ UDPGothic" charset="0"/>
                         <a:ea typeface="BIZ UDPGothic" charset="0"/>
                         <a:cs typeface="BIZ UDPGothic" charset="0"/>
                       </a:endParaRPr>
                     </a:p>
                   </a:txBody>
-                  <a:tcPr marL="63500" marR="63500" marT="63500" marB="63500">
+                  <a:tcPr marL="38100" marR="38100" marT="38100" marB="38100">
                     <a:lnL w="5080" cap="flat" cmpd="sng" algn="ctr">
                       <a:solidFill>
                         <a:srgbClr val="677276"/>
@@ -5597,7 +5614,7 @@
         </p:nvSpPr>
         <p:spPr>
           <a:xfrm>
-            <a:off x="594360" y="4517136"/>
+            <a:off x="594360" y="4443984"/>
             <a:ext cx="7955280" cy="182880"/>
           </a:xfrm>
           <a:prstGeom prst="rect">
